--- a/ゲーム科1年/01_後期/プログラミングⅢ/03_コンストラクタ.pptx
+++ b/ゲーム科1年/01_後期/プログラミングⅢ/03_コンストラクタ.pptx
@@ -267,7 +267,7 @@
           <a:p>
             <a:fld id="{E9CC885B-4903-4D54-9A93-00025F12DED9}" type="datetimeFigureOut">
               <a:rPr kumimoji="1" lang="ja-JP" altLang="en-US" smtClean="0"/>
-              <a:t>2024/11/8</a:t>
+              <a:t>2025/2/7</a:t>
             </a:fld>
             <a:endParaRPr kumimoji="1" lang="ja-JP" altLang="en-US"/>
           </a:p>
@@ -497,7 +497,7 @@
           <a:p>
             <a:fld id="{E9CC885B-4903-4D54-9A93-00025F12DED9}" type="datetimeFigureOut">
               <a:rPr kumimoji="1" lang="ja-JP" altLang="en-US" smtClean="0"/>
-              <a:t>2024/11/8</a:t>
+              <a:t>2025/2/7</a:t>
             </a:fld>
             <a:endParaRPr kumimoji="1" lang="ja-JP" altLang="en-US"/>
           </a:p>
@@ -737,7 +737,7 @@
           <a:p>
             <a:fld id="{E9CC885B-4903-4D54-9A93-00025F12DED9}" type="datetimeFigureOut">
               <a:rPr kumimoji="1" lang="ja-JP" altLang="en-US" smtClean="0"/>
-              <a:t>2024/11/8</a:t>
+              <a:t>2025/2/7</a:t>
             </a:fld>
             <a:endParaRPr kumimoji="1" lang="ja-JP" altLang="en-US"/>
           </a:p>
@@ -967,7 +967,7 @@
           <a:p>
             <a:fld id="{E9CC885B-4903-4D54-9A93-00025F12DED9}" type="datetimeFigureOut">
               <a:rPr kumimoji="1" lang="ja-JP" altLang="en-US" smtClean="0"/>
-              <a:t>2024/11/8</a:t>
+              <a:t>2025/2/7</a:t>
             </a:fld>
             <a:endParaRPr kumimoji="1" lang="ja-JP" altLang="en-US"/>
           </a:p>
@@ -1242,7 +1242,7 @@
           <a:p>
             <a:fld id="{E9CC885B-4903-4D54-9A93-00025F12DED9}" type="datetimeFigureOut">
               <a:rPr kumimoji="1" lang="ja-JP" altLang="en-US" smtClean="0"/>
-              <a:t>2024/11/8</a:t>
+              <a:t>2025/2/7</a:t>
             </a:fld>
             <a:endParaRPr kumimoji="1" lang="ja-JP" altLang="en-US"/>
           </a:p>
@@ -1571,7 +1571,7 @@
           <a:p>
             <a:fld id="{E9CC885B-4903-4D54-9A93-00025F12DED9}" type="datetimeFigureOut">
               <a:rPr kumimoji="1" lang="ja-JP" altLang="en-US" smtClean="0"/>
-              <a:t>2024/11/8</a:t>
+              <a:t>2025/2/7</a:t>
             </a:fld>
             <a:endParaRPr kumimoji="1" lang="ja-JP" altLang="en-US"/>
           </a:p>
@@ -2047,7 +2047,7 @@
           <a:p>
             <a:fld id="{E9CC885B-4903-4D54-9A93-00025F12DED9}" type="datetimeFigureOut">
               <a:rPr kumimoji="1" lang="ja-JP" altLang="en-US" smtClean="0"/>
-              <a:t>2024/11/8</a:t>
+              <a:t>2025/2/7</a:t>
             </a:fld>
             <a:endParaRPr kumimoji="1" lang="ja-JP" altLang="en-US"/>
           </a:p>
@@ -2188,7 +2188,7 @@
           <a:p>
             <a:fld id="{E9CC885B-4903-4D54-9A93-00025F12DED9}" type="datetimeFigureOut">
               <a:rPr kumimoji="1" lang="ja-JP" altLang="en-US" smtClean="0"/>
-              <a:t>2024/11/8</a:t>
+              <a:t>2025/2/7</a:t>
             </a:fld>
             <a:endParaRPr kumimoji="1" lang="ja-JP" altLang="en-US"/>
           </a:p>
@@ -2301,7 +2301,7 @@
           <a:p>
             <a:fld id="{E9CC885B-4903-4D54-9A93-00025F12DED9}" type="datetimeFigureOut">
               <a:rPr kumimoji="1" lang="ja-JP" altLang="en-US" smtClean="0"/>
-              <a:t>2024/11/8</a:t>
+              <a:t>2025/2/7</a:t>
             </a:fld>
             <a:endParaRPr kumimoji="1" lang="ja-JP" altLang="en-US"/>
           </a:p>
@@ -2644,7 +2644,7 @@
           <a:p>
             <a:fld id="{E9CC885B-4903-4D54-9A93-00025F12DED9}" type="datetimeFigureOut">
               <a:rPr kumimoji="1" lang="ja-JP" altLang="en-US" smtClean="0"/>
-              <a:t>2024/11/8</a:t>
+              <a:t>2025/2/7</a:t>
             </a:fld>
             <a:endParaRPr kumimoji="1" lang="ja-JP" altLang="en-US"/>
           </a:p>
@@ -2932,7 +2932,7 @@
           <a:p>
             <a:fld id="{E9CC885B-4903-4D54-9A93-00025F12DED9}" type="datetimeFigureOut">
               <a:rPr kumimoji="1" lang="ja-JP" altLang="en-US" smtClean="0"/>
-              <a:t>2024/11/8</a:t>
+              <a:t>2025/2/7</a:t>
             </a:fld>
             <a:endParaRPr kumimoji="1" lang="ja-JP" altLang="en-US"/>
           </a:p>
@@ -3205,7 +3205,7 @@
           <a:p>
             <a:fld id="{E9CC885B-4903-4D54-9A93-00025F12DED9}" type="datetimeFigureOut">
               <a:rPr kumimoji="1" lang="ja-JP" altLang="en-US" smtClean="0"/>
-              <a:t>2024/11/8</a:t>
+              <a:t>2025/2/7</a:t>
             </a:fld>
             <a:endParaRPr kumimoji="1" lang="ja-JP" altLang="en-US"/>
           </a:p>
@@ -5146,7 +5146,7 @@
         <p:spPr>
           <a:xfrm>
             <a:off x="3624789" y="3615718"/>
-            <a:ext cx="5452134" cy="461665"/>
+            <a:ext cx="5532284" cy="461665"/>
           </a:xfrm>
           <a:prstGeom prst="rect">
             <a:avLst/>
@@ -5179,12 +5179,24 @@
               <a:t>にしないと</a:t>
             </a:r>
             <a:r>
-              <a:rPr lang="en-US" altLang="ja-JP" sz="2400" dirty="0"/>
+              <a:rPr lang="en-US" altLang="ja-JP" sz="2400" b="1" dirty="0">
+                <a:solidFill>
+                  <a:srgbClr val="0070C0"/>
+                </a:solidFill>
+              </a:rPr>
               <a:t>main</a:t>
             </a:r>
             <a:r>
+              <a:rPr lang="ja-JP" altLang="en-US" sz="2400" b="1" dirty="0">
+                <a:solidFill>
+                  <a:srgbClr val="0070C0"/>
+                </a:solidFill>
+              </a:rPr>
+              <a:t>関数</a:t>
+            </a:r>
+            <a:r>
               <a:rPr lang="ja-JP" altLang="en-US" sz="2400" dirty="0"/>
-              <a:t>関数で呼べない</a:t>
+              <a:t>で呼べない</a:t>
             </a:r>
             <a:endParaRPr kumimoji="1" lang="en-US" altLang="ja-JP" sz="2400" dirty="0"/>
           </a:p>

--- a/ゲーム科1年/01_後期/プログラミングⅢ/03_コンストラクタ.pptx
+++ b/ゲーム科1年/01_後期/プログラミングⅢ/03_コンストラクタ.pptx
@@ -267,7 +267,7 @@
           <a:p>
             <a:fld id="{E9CC885B-4903-4D54-9A93-00025F12DED9}" type="datetimeFigureOut">
               <a:rPr kumimoji="1" lang="ja-JP" altLang="en-US" smtClean="0"/>
-              <a:t>2025/2/7</a:t>
+              <a:t>2026/5/15</a:t>
             </a:fld>
             <a:endParaRPr kumimoji="1" lang="ja-JP" altLang="en-US"/>
           </a:p>
@@ -497,7 +497,7 @@
           <a:p>
             <a:fld id="{E9CC885B-4903-4D54-9A93-00025F12DED9}" type="datetimeFigureOut">
               <a:rPr kumimoji="1" lang="ja-JP" altLang="en-US" smtClean="0"/>
-              <a:t>2025/2/7</a:t>
+              <a:t>2026/5/15</a:t>
             </a:fld>
             <a:endParaRPr kumimoji="1" lang="ja-JP" altLang="en-US"/>
           </a:p>
@@ -737,7 +737,7 @@
           <a:p>
             <a:fld id="{E9CC885B-4903-4D54-9A93-00025F12DED9}" type="datetimeFigureOut">
               <a:rPr kumimoji="1" lang="ja-JP" altLang="en-US" smtClean="0"/>
-              <a:t>2025/2/7</a:t>
+              <a:t>2026/5/15</a:t>
             </a:fld>
             <a:endParaRPr kumimoji="1" lang="ja-JP" altLang="en-US"/>
           </a:p>
@@ -967,7 +967,7 @@
           <a:p>
             <a:fld id="{E9CC885B-4903-4D54-9A93-00025F12DED9}" type="datetimeFigureOut">
               <a:rPr kumimoji="1" lang="ja-JP" altLang="en-US" smtClean="0"/>
-              <a:t>2025/2/7</a:t>
+              <a:t>2026/5/15</a:t>
             </a:fld>
             <a:endParaRPr kumimoji="1" lang="ja-JP" altLang="en-US"/>
           </a:p>
@@ -1242,7 +1242,7 @@
           <a:p>
             <a:fld id="{E9CC885B-4903-4D54-9A93-00025F12DED9}" type="datetimeFigureOut">
               <a:rPr kumimoji="1" lang="ja-JP" altLang="en-US" smtClean="0"/>
-              <a:t>2025/2/7</a:t>
+              <a:t>2026/5/15</a:t>
             </a:fld>
             <a:endParaRPr kumimoji="1" lang="ja-JP" altLang="en-US"/>
           </a:p>
@@ -1571,7 +1571,7 @@
           <a:p>
             <a:fld id="{E9CC885B-4903-4D54-9A93-00025F12DED9}" type="datetimeFigureOut">
               <a:rPr kumimoji="1" lang="ja-JP" altLang="en-US" smtClean="0"/>
-              <a:t>2025/2/7</a:t>
+              <a:t>2026/5/15</a:t>
             </a:fld>
             <a:endParaRPr kumimoji="1" lang="ja-JP" altLang="en-US"/>
           </a:p>
@@ -2047,7 +2047,7 @@
           <a:p>
             <a:fld id="{E9CC885B-4903-4D54-9A93-00025F12DED9}" type="datetimeFigureOut">
               <a:rPr kumimoji="1" lang="ja-JP" altLang="en-US" smtClean="0"/>
-              <a:t>2025/2/7</a:t>
+              <a:t>2026/5/15</a:t>
             </a:fld>
             <a:endParaRPr kumimoji="1" lang="ja-JP" altLang="en-US"/>
           </a:p>
@@ -2188,7 +2188,7 @@
           <a:p>
             <a:fld id="{E9CC885B-4903-4D54-9A93-00025F12DED9}" type="datetimeFigureOut">
               <a:rPr kumimoji="1" lang="ja-JP" altLang="en-US" smtClean="0"/>
-              <a:t>2025/2/7</a:t>
+              <a:t>2026/5/15</a:t>
             </a:fld>
             <a:endParaRPr kumimoji="1" lang="ja-JP" altLang="en-US"/>
           </a:p>
@@ -2301,7 +2301,7 @@
           <a:p>
             <a:fld id="{E9CC885B-4903-4D54-9A93-00025F12DED9}" type="datetimeFigureOut">
               <a:rPr kumimoji="1" lang="ja-JP" altLang="en-US" smtClean="0"/>
-              <a:t>2025/2/7</a:t>
+              <a:t>2026/5/15</a:t>
             </a:fld>
             <a:endParaRPr kumimoji="1" lang="ja-JP" altLang="en-US"/>
           </a:p>
@@ -2644,7 +2644,7 @@
           <a:p>
             <a:fld id="{E9CC885B-4903-4D54-9A93-00025F12DED9}" type="datetimeFigureOut">
               <a:rPr kumimoji="1" lang="ja-JP" altLang="en-US" smtClean="0"/>
-              <a:t>2025/2/7</a:t>
+              <a:t>2026/5/15</a:t>
             </a:fld>
             <a:endParaRPr kumimoji="1" lang="ja-JP" altLang="en-US"/>
           </a:p>
@@ -2932,7 +2932,7 @@
           <a:p>
             <a:fld id="{E9CC885B-4903-4D54-9A93-00025F12DED9}" type="datetimeFigureOut">
               <a:rPr kumimoji="1" lang="ja-JP" altLang="en-US" smtClean="0"/>
-              <a:t>2025/2/7</a:t>
+              <a:t>2026/5/15</a:t>
             </a:fld>
             <a:endParaRPr kumimoji="1" lang="ja-JP" altLang="en-US"/>
           </a:p>
@@ -3205,7 +3205,7 @@
           <a:p>
             <a:fld id="{E9CC885B-4903-4D54-9A93-00025F12DED9}" type="datetimeFigureOut">
               <a:rPr kumimoji="1" lang="ja-JP" altLang="en-US" smtClean="0"/>
-              <a:t>2025/2/7</a:t>
+              <a:t>2026/5/15</a:t>
             </a:fld>
             <a:endParaRPr kumimoji="1" lang="ja-JP" altLang="en-US"/>
           </a:p>
@@ -3672,7 +3672,7 @@
         <p:spPr>
           <a:xfrm>
             <a:off x="567542" y="1216429"/>
-            <a:ext cx="9110186" cy="2308324"/>
+            <a:ext cx="9725739" cy="2308324"/>
           </a:xfrm>
           <a:prstGeom prst="rect">
             <a:avLst/>
@@ -3699,7 +3699,7 @@
             </a:r>
             <a:r>
               <a:rPr kumimoji="1" lang="ja-JP" altLang="en-US" sz="2400" dirty="0"/>
-              <a:t>という関数を書くことができます。</a:t>
+              <a:t>という特別な関数を書くことができます。</a:t>
             </a:r>
             <a:endParaRPr kumimoji="1" lang="en-US" altLang="ja-JP" sz="2400" dirty="0"/>
           </a:p>
